--- a/vta/slides/Module_9_Special_Populations.pptx
+++ b/vta/slides/Module_9_Special_Populations.pptx
@@ -1962,7 +1962,7 @@
                 <a:ea typeface="Calibri" pitchFamily="34" charset="-122"/>
                 <a:cs typeface="Calibri" pitchFamily="34" charset="-120"/>
               </a:rPr>
-              <a:t>Day 2 · Application</a:t>
+              <a:t>Application</a:t>
             </a:r>
             <a:pPr indent="0" marL="0">
               <a:buNone/>
@@ -1976,7 +1976,7 @@
                 <a:ea typeface="Calibri" pitchFamily="34" charset="-122"/>
                 <a:cs typeface="Calibri" pitchFamily="34" charset="-120"/>
               </a:rPr>
-              <a:t>   ·   ~60 min   ·   6 lessons</a:t>
+              <a:t>   ·   6 lessons</a:t>
             </a:r>
             <a:endParaRPr lang="en-US" sz="1300" dirty="0"/>
           </a:p>
@@ -3584,7 +3584,7 @@
         <p:spPr>
           <a:xfrm>
             <a:off x="548640" y="2148840"/>
-            <a:ext cx="10058400" cy="4114800"/>
+            <a:ext cx="10058400" cy="4160520"/>
           </a:xfrm>
           <a:prstGeom prst="rect">
             <a:avLst/>
@@ -3601,7 +3601,7 @@
                 <a:spcPct val="100000"/>
               </a:lnSpc>
               <a:spcAft>
-                <a:spcPts val="900"/>
+                <a:spcPts val="1000"/>
               </a:spcAft>
               <a:buSzPct val="100000"/>
               <a:buChar char="•"/>
@@ -3615,7 +3615,7 @@
                 <a:ea typeface="Calibri" pitchFamily="34" charset="-122"/>
                 <a:cs typeface="Calibri" pitchFamily="34" charset="-120"/>
               </a:rPr>
-              <a:t>Obstructive disease is fundamentally an EXHALATION problem.</a:t>
+              <a:t>Obstructive disease is fundamentally an EXHALATION problem. Air goes in easily; getting it out takes time.</a:t>
             </a:r>
             <a:endParaRPr lang="en-US" sz="1550" dirty="0"/>
           </a:p>
@@ -3625,7 +3625,7 @@
                 <a:spcPct val="100000"/>
               </a:lnSpc>
               <a:spcAft>
-                <a:spcPts val="900"/>
+                <a:spcPts val="1000"/>
               </a:spcAft>
               <a:buSzPct val="100000"/>
               <a:buChar char="•"/>
@@ -3639,7 +3639,7 @@
                 <a:ea typeface="Calibri" pitchFamily="34" charset="-122"/>
                 <a:cs typeface="Calibri" pitchFamily="34" charset="-120"/>
               </a:rPr>
-              <a:t>Strategy: low rate (RR 8–10), long expiratory time (I:E 1:4 or 1:5), Vt 6–8 mL/kg IBW, FiO₂ to SpO₂ ≥ 88% (COPD) or ≥ 92% (asthma), PEEP 0–5 cmH₂O.</a:t>
+              <a:t>Strategy: low rate (RR 8–10), long expiratory time (I:E 1:4 or 1:5), Vt 6–8 mL/kg IBW, FiO₂ to SpO₂ ≥ 88% (COPD) or ≥ 92% (asthma), PEEP 0–5 cmH₂O. Permissive hypercapnia is acceptable; pH ≥ 7.20 typical floor.</a:t>
             </a:r>
             <a:endParaRPr lang="en-US" sz="1550" dirty="0"/>
           </a:p>
@@ -3649,7 +3649,7 @@
                 <a:spcPct val="100000"/>
               </a:lnSpc>
               <a:spcAft>
-                <a:spcPts val="900"/>
+                <a:spcPts val="1000"/>
               </a:spcAft>
               <a:buSzPct val="100000"/>
               <a:buChar char="•"/>
@@ -3663,7 +3663,7 @@
                 <a:ea typeface="Calibri" pitchFamily="34" charset="-122"/>
                 <a:cs typeface="Calibri" pitchFamily="34" charset="-120"/>
               </a:rPr>
-              <a:t>Don't chase a normal CO₂ at the cost of barotrauma.</a:t>
+              <a:t>Don't chase a normal CO₂ at the cost of barotrauma. Forcing the rate up stacks breaths and drops BP via auto-PEEP.</a:t>
             </a:r>
             <a:endParaRPr lang="en-US" sz="1550" dirty="0"/>
           </a:p>
@@ -3827,7 +3827,7 @@
         <p:spPr>
           <a:xfrm>
             <a:off x="548640" y="2148840"/>
-            <a:ext cx="6309360" cy="4114800"/>
+            <a:ext cx="6309360" cy="4160520"/>
           </a:xfrm>
           <a:prstGeom prst="rect">
             <a:avLst/>
@@ -3844,7 +3844,7 @@
                 <a:spcPct val="100000"/>
               </a:lnSpc>
               <a:spcAft>
-                <a:spcPts val="900"/>
+                <a:spcPts val="1000"/>
               </a:spcAft>
               <a:buSzPct val="100000"/>
               <a:buChar char="•"/>
@@ -3868,7 +3868,7 @@
                 <a:spcPct val="100000"/>
               </a:lnSpc>
               <a:spcAft>
-                <a:spcPts val="900"/>
+                <a:spcPts val="1000"/>
               </a:spcAft>
               <a:buSzPct val="100000"/>
               <a:buChar char="•"/>
@@ -3892,7 +3892,7 @@
                 <a:spcPct val="100000"/>
               </a:lnSpc>
               <a:spcAft>
-                <a:spcPts val="900"/>
+                <a:spcPts val="1000"/>
               </a:spcAft>
               <a:buSzPct val="100000"/>
               <a:buChar char="•"/>
@@ -3906,7 +3906,7 @@
                 <a:ea typeface="Calibri" pitchFamily="34" charset="-122"/>
                 <a:cs typeface="Calibri" pitchFamily="34" charset="-120"/>
               </a:rPr>
-              <a:t>Management: slow RR (often dramatically — to 8 or even 6).</a:t>
+              <a:t>Management: slow RR (often dramatically — to 8 or even 6). Lengthen exp time (I:E 1:4 or 1:5).</a:t>
             </a:r>
             <a:endParaRPr lang="en-US" sz="1550" dirty="0"/>
           </a:p>
@@ -3916,7 +3916,7 @@
                 <a:spcPct val="100000"/>
               </a:lnSpc>
               <a:spcAft>
-                <a:spcPts val="900"/>
+                <a:spcPts val="1000"/>
               </a:spcAft>
               <a:buSzPct val="100000"/>
               <a:buChar char="•"/>
@@ -3930,7 +3930,7 @@
                 <a:ea typeface="Calibri" pitchFamily="34" charset="-122"/>
                 <a:cs typeface="Calibri" pitchFamily="34" charset="-120"/>
               </a:rPr>
-              <a:t>If hemodynamically compromised: BRIEFLY DISCONNECT FROM THE VENT for 5–10 seconds.</a:t>
+              <a:t>If hemodynamically compromised: BRIEFLY DISCONNECT FROM THE VENT for 5–10 seconds. Trapped gas releases. BP often improves immediately. Reconnect on slower settings.</a:t>
             </a:r>
             <a:endParaRPr lang="en-US" sz="1550" dirty="0"/>
           </a:p>
@@ -4239,7 +4239,7 @@
         <p:spPr>
           <a:xfrm>
             <a:off x="548640" y="2148840"/>
-            <a:ext cx="6309360" cy="4114800"/>
+            <a:ext cx="6309360" cy="4160520"/>
           </a:xfrm>
           <a:prstGeom prst="rect">
             <a:avLst/>
@@ -4256,7 +4256,7 @@
                 <a:spcPct val="100000"/>
               </a:lnSpc>
               <a:spcAft>
-                <a:spcPts val="900"/>
+                <a:spcPts val="1000"/>
               </a:spcAft>
               <a:buSzPct val="100000"/>
               <a:buChar char="•"/>
@@ -4270,7 +4270,7 @@
                 <a:ea typeface="Calibri" pitchFamily="34" charset="-122"/>
                 <a:cs typeface="Calibri" pitchFamily="34" charset="-120"/>
               </a:rPr>
-              <a:t>Acute Respiratory Distress Syndrome: diffuse alveolar damage, refractory hypoxia.</a:t>
+              <a:t>Acute Respiratory Distress Syndrome: diffuse alveolar damage, refractory hypoxia. Berlin definition (2012): bilateral infiltrates, not cardiac, within 1 week.</a:t>
             </a:r>
             <a:endParaRPr lang="en-US" sz="1550" dirty="0"/>
           </a:p>
@@ -4280,7 +4280,7 @@
                 <a:spcPct val="100000"/>
               </a:lnSpc>
               <a:spcAft>
-                <a:spcPts val="900"/>
+                <a:spcPts val="1000"/>
               </a:spcAft>
               <a:buSzPct val="100000"/>
               <a:buChar char="•"/>
@@ -4294,7 +4294,7 @@
                 <a:ea typeface="Calibri" pitchFamily="34" charset="-122"/>
                 <a:cs typeface="Calibri" pitchFamily="34" charset="-120"/>
               </a:rPr>
-              <a:t>Goal: protect the alveoli you have left.</a:t>
+              <a:t>Goal: protect the alveoli you have left. The mental model is the 'baby lung' — in ARDS so much lung is flooded or collapsed that only a small, child-sized portion is still open to ventilate.</a:t>
             </a:r>
             <a:endParaRPr lang="en-US" sz="1550" dirty="0"/>
           </a:p>
@@ -4304,7 +4304,7 @@
                 <a:spcPct val="100000"/>
               </a:lnSpc>
               <a:spcAft>
-                <a:spcPts val="900"/>
+                <a:spcPts val="1000"/>
               </a:spcAft>
               <a:buSzPct val="100000"/>
               <a:buChar char="•"/>
@@ -4318,7 +4318,7 @@
                 <a:ea typeface="Calibri" pitchFamily="34" charset="-122"/>
                 <a:cs typeface="Calibri" pitchFamily="34" charset="-120"/>
               </a:rPr>
-              <a:t>Settings: AC/VC or AC/PC; Vt 4–6 mL/kg IBW (LOWER than usual); RR 18–22 to maintain MV; PEEP 10–15 per ARDSNet table; Pplat &lt; 30; driving pressure (Pplat…</a:t>
+              <a:t>Settings: AC/VC or AC/PC; Vt 4–6 mL/kg IBW (LOWER than usual); RR 18–22 to maintain MV; PEEP 10–15 per ARDSNet table; Pplat &lt; 30; driving pressure (Pplat − PEEP) &lt; 14 cmH₂O.</a:t>
             </a:r>
             <a:endParaRPr lang="en-US" sz="1550" dirty="0"/>
           </a:p>
@@ -4328,7 +4328,7 @@
                 <a:spcPct val="100000"/>
               </a:lnSpc>
               <a:spcAft>
-                <a:spcPts val="900"/>
+                <a:spcPts val="1000"/>
               </a:spcAft>
               <a:buSzPct val="100000"/>
               <a:buChar char="•"/>
@@ -4342,7 +4342,7 @@
                 <a:ea typeface="Calibri" pitchFamily="34" charset="-122"/>
                 <a:cs typeface="Calibri" pitchFamily="34" charset="-120"/>
               </a:rPr>
-              <a:t>ARDSNet ARMA (NEJM 2000): mortality 31% vs 40% comparing 6 vs 12 mL/kg IBW.</a:t>
+              <a:t>ARDSNet ARMA (NEJM 2000): mortality 31% vs 40% comparing 6 vs 12 mL/kg IBW. NNT 11. The most evidence-based ARDS intervention.</a:t>
             </a:r>
             <a:endParaRPr lang="en-US" sz="1550" dirty="0"/>
           </a:p>
@@ -4651,7 +4651,7 @@
         <p:spPr>
           <a:xfrm>
             <a:off x="548640" y="2148840"/>
-            <a:ext cx="10058400" cy="4114800"/>
+            <a:ext cx="10058400" cy="4160520"/>
           </a:xfrm>
           <a:prstGeom prst="rect">
             <a:avLst/>
@@ -4668,13 +4668,13 @@
                 <a:spcPct val="100000"/>
               </a:lnSpc>
               <a:spcAft>
-                <a:spcPts val="900"/>
+                <a:spcPts val="800"/>
               </a:spcAft>
               <a:buSzPct val="100000"/>
               <a:buChar char="•"/>
             </a:pPr>
             <a:r>
-              <a:rPr lang="en-US" sz="1550" dirty="0">
+              <a:rPr lang="en-US" sz="1450" dirty="0">
                 <a:solidFill>
                   <a:srgbClr val="1B2433"/>
                 </a:solidFill>
@@ -4684,7 +4684,7 @@
               </a:rPr>
               <a:t>When lung-protective settings (6 mL/kg, Pplat &lt; 30, ΔP &lt; 14) aren't enough, these are the rescue options — roughly in order of evidence:</a:t>
             </a:r>
-            <a:endParaRPr lang="en-US" sz="1550" dirty="0"/>
+            <a:endParaRPr lang="en-US" sz="1450" dirty="0"/>
           </a:p>
           <a:p>
             <a:pPr marL="177800" indent="-177800">
@@ -4692,13 +4692,13 @@
                 <a:spcPct val="100000"/>
               </a:lnSpc>
               <a:spcAft>
-                <a:spcPts val="900"/>
+                <a:spcPts val="800"/>
               </a:spcAft>
               <a:buSzPct val="100000"/>
               <a:buChar char="•"/>
             </a:pPr>
             <a:r>
-              <a:rPr lang="en-US" sz="1550" dirty="0">
+              <a:rPr lang="en-US" sz="1450" dirty="0">
                 <a:solidFill>
                   <a:srgbClr val="1B2433"/>
                 </a:solidFill>
@@ -4706,9 +4706,9 @@
                 <a:ea typeface="Calibri" pitchFamily="34" charset="-122"/>
                 <a:cs typeface="Calibri" pitchFamily="34" charset="-120"/>
               </a:rPr>
-              <a:t>Prone positioning — PROSEVA (Guérin, NEJM 2013): 16 hr/day in severe ARDS (P/F &lt; 150). Mortality 33% → 16%, NNT 6.…</a:t>
-            </a:r>
-            <a:endParaRPr lang="en-US" sz="1550" dirty="0"/>
+              <a:t>Prone positioning — PROSEVA (Guérin, NEJM 2013): 16 hr/day in severe ARDS (P/F &lt; 150). Mortality 33% → 16%, NNT 6. The strongest single rescue.</a:t>
+            </a:r>
+            <a:endParaRPr lang="en-US" sz="1450" dirty="0"/>
           </a:p>
           <a:p>
             <a:pPr marL="177800" indent="-177800">
@@ -4716,13 +4716,13 @@
                 <a:spcPct val="100000"/>
               </a:lnSpc>
               <a:spcAft>
-                <a:spcPts val="900"/>
+                <a:spcPts val="800"/>
               </a:spcAft>
               <a:buSzPct val="100000"/>
               <a:buChar char="•"/>
             </a:pPr>
             <a:r>
-              <a:rPr lang="en-US" sz="1550" dirty="0">
+              <a:rPr lang="en-US" sz="1450" dirty="0">
                 <a:solidFill>
                   <a:srgbClr val="1B2433"/>
                 </a:solidFill>
@@ -4730,9 +4730,9 @@
                 <a:ea typeface="Calibri" pitchFamily="34" charset="-122"/>
                 <a:cs typeface="Calibri" pitchFamily="34" charset="-120"/>
               </a:rPr>
-              <a:t>Neuromuscular blockade — ACURASYS (NEJM 2010) showed a mortality benefit with 48-hr cisatracurium; ROSE (NEJM 2019)…</a:t>
-            </a:r>
-            <a:endParaRPr lang="en-US" sz="1550" dirty="0"/>
+              <a:t>Neuromuscular blockade — ACURASYS (NEJM 2010) showed a mortality benefit with 48-hr cisatracurium; ROSE (NEJM 2019) didn't replicate it. Now…</a:t>
+            </a:r>
+            <a:endParaRPr lang="en-US" sz="1450" dirty="0"/>
           </a:p>
           <a:p>
             <a:pPr marL="177800" indent="-177800">
@@ -4740,13 +4740,13 @@
                 <a:spcPct val="100000"/>
               </a:lnSpc>
               <a:spcAft>
-                <a:spcPts val="900"/>
+                <a:spcPts val="800"/>
               </a:spcAft>
               <a:buSzPct val="100000"/>
               <a:buChar char="•"/>
             </a:pPr>
             <a:r>
-              <a:rPr lang="en-US" sz="1550" dirty="0">
+              <a:rPr lang="en-US" sz="1450" dirty="0">
                 <a:solidFill>
                   <a:srgbClr val="1B2433"/>
                 </a:solidFill>
@@ -4756,7 +4756,7 @@
               </a:rPr>
               <a:t>HFOV — OSCILLATE / OSCAR (NEJM 2013): no benefit; OSCILLATE was stopped for harm. Not first-line.</a:t>
             </a:r>
-            <a:endParaRPr lang="en-US" sz="1550" dirty="0"/>
+            <a:endParaRPr lang="en-US" sz="1450" dirty="0"/>
           </a:p>
           <a:p>
             <a:pPr marL="177800" indent="-177800">
@@ -4764,13 +4764,13 @@
                 <a:spcPct val="100000"/>
               </a:lnSpc>
               <a:spcAft>
-                <a:spcPts val="900"/>
+                <a:spcPts val="800"/>
               </a:spcAft>
               <a:buSzPct val="100000"/>
               <a:buChar char="•"/>
             </a:pPr>
             <a:r>
-              <a:rPr lang="en-US" sz="1550" dirty="0">
+              <a:rPr lang="en-US" sz="1450" dirty="0">
                 <a:solidFill>
                   <a:srgbClr val="1B2433"/>
                 </a:solidFill>
@@ -4778,9 +4778,9 @@
                 <a:ea typeface="Calibri" pitchFamily="34" charset="-122"/>
                 <a:cs typeface="Calibri" pitchFamily="34" charset="-120"/>
               </a:rPr>
-              <a:t>ECMO — ICU-level. Transport teams may move ECMO patients but don't initiate. Notify the receiving facility early…</a:t>
-            </a:r>
-            <a:endParaRPr lang="en-US" sz="1550" dirty="0"/>
+              <a:t>ECMO — ICU-level. Transport teams may move ECMO patients but don't initiate. Notify the receiving facility early when standard care is failing.</a:t>
+            </a:r>
+            <a:endParaRPr lang="en-US" sz="1450" dirty="0"/>
           </a:p>
         </p:txBody>
       </p:sp>
@@ -4942,7 +4942,7 @@
         <p:spPr>
           <a:xfrm>
             <a:off x="548640" y="2148840"/>
-            <a:ext cx="6309360" cy="4114800"/>
+            <a:ext cx="6309360" cy="4160520"/>
           </a:xfrm>
           <a:prstGeom prst="rect">
             <a:avLst/>
@@ -4959,7 +4959,7 @@
                 <a:spcPct val="100000"/>
               </a:lnSpc>
               <a:spcAft>
-                <a:spcPts val="900"/>
+                <a:spcPts val="1000"/>
               </a:spcAft>
               <a:buSzPct val="100000"/>
               <a:buChar char="•"/>
@@ -4973,7 +4973,7 @@
                 <a:ea typeface="Calibri" pitchFamily="34" charset="-122"/>
                 <a:cs typeface="Calibri" pitchFamily="34" charset="-120"/>
               </a:rPr>
-              <a:t>Two enemies of the injured brain: hypoxia and hypotension.</a:t>
+              <a:t>Two enemies of the injured brain: hypoxia and hypotension. A single SpO₂ &lt; 90 or SBP &lt; 90 doubles mortality in moderate-severe TBI (Brain Trauma Foundation 4th ed., 2017).</a:t>
             </a:r>
             <a:endParaRPr lang="en-US" sz="1550" dirty="0"/>
           </a:p>
@@ -4983,7 +4983,7 @@
                 <a:spcPct val="100000"/>
               </a:lnSpc>
               <a:spcAft>
-                <a:spcPts val="900"/>
+                <a:spcPts val="1000"/>
               </a:spcAft>
               <a:buSzPct val="100000"/>
               <a:buChar char="•"/>
@@ -4997,7 +4997,7 @@
                 <a:ea typeface="Calibri" pitchFamily="34" charset="-122"/>
                 <a:cs typeface="Calibri" pitchFamily="34" charset="-120"/>
               </a:rPr>
-              <a:t>Strict normocapnia: target EtCO₂ 35–40 mmHg.</a:t>
+              <a:t>Strict normocapnia: target EtCO₂ 35–40 mmHg. Avoid prophylactic hyperventilation (BTF Level IIB recommendation) — drops cerebral blood flow and worsens secondary injury.</a:t>
             </a:r>
             <a:endParaRPr lang="en-US" sz="1550" dirty="0"/>
           </a:p>
@@ -5007,7 +5007,7 @@
                 <a:spcPct val="100000"/>
               </a:lnSpc>
               <a:spcAft>
-                <a:spcPts val="900"/>
+                <a:spcPts val="1000"/>
               </a:spcAft>
               <a:buSzPct val="100000"/>
               <a:buChar char="•"/>
@@ -5031,7 +5031,7 @@
                 <a:spcPct val="100000"/>
               </a:lnSpc>
               <a:spcAft>
-                <a:spcPts val="900"/>
+                <a:spcPts val="1000"/>
               </a:spcAft>
               <a:buSzPct val="100000"/>
               <a:buChar char="•"/>
@@ -5045,7 +5045,7 @@
                 <a:ea typeface="Calibri" pitchFamily="34" charset="-122"/>
                 <a:cs typeface="Calibri" pitchFamily="34" charset="-120"/>
               </a:rPr>
-              <a:t>Hyperventilation rescue (transient, for impending herniation only): increase RR to target EtCO₂ 30–35 mmHg (NEVER below 30).</a:t>
+              <a:t>Hyperventilation rescue (transient, for impending herniation only): increase RR to target EtCO₂ 30–35 mmHg (NEVER below 30). Return to normocapnia once the exam improves (typically 2–5 min).</a:t>
             </a:r>
             <a:endParaRPr lang="en-US" sz="1550" dirty="0"/>
           </a:p>
@@ -5354,7 +5354,7 @@
         <p:spPr>
           <a:xfrm>
             <a:off x="548640" y="2148840"/>
-            <a:ext cx="10058400" cy="4114800"/>
+            <a:ext cx="10058400" cy="4160520"/>
           </a:xfrm>
           <a:prstGeom prst="rect">
             <a:avLst/>
@@ -5371,7 +5371,7 @@
                 <a:spcPct val="100000"/>
               </a:lnSpc>
               <a:spcAft>
-                <a:spcPts val="900"/>
+                <a:spcPts val="1000"/>
               </a:spcAft>
               <a:buSzPct val="100000"/>
               <a:buChar char="•"/>
@@ -5385,7 +5385,7 @@
                 <a:ea typeface="Calibri" pitchFamily="34" charset="-122"/>
                 <a:cs typeface="Calibri" pitchFamily="34" charset="-120"/>
               </a:rPr>
-              <a:t>Use length-based weight (Broselow / Handtevy) — don't guess.</a:t>
+              <a:t>Use length-based weight (Broselow / Handtevy) — don't guess. Vt 6–8 mL/kg of ACTUAL body weight in peds (different from adults).</a:t>
             </a:r>
             <a:endParaRPr lang="en-US" sz="1550" dirty="0"/>
           </a:p>
@@ -5395,7 +5395,7 @@
                 <a:spcPct val="100000"/>
               </a:lnSpc>
               <a:spcAft>
-                <a:spcPts val="900"/>
+                <a:spcPts val="1000"/>
               </a:spcAft>
               <a:buSzPct val="100000"/>
               <a:buChar char="•"/>
@@ -5409,7 +5409,7 @@
                 <a:ea typeface="Calibri" pitchFamily="34" charset="-122"/>
                 <a:cs typeface="Calibri" pitchFamily="34" charset="-120"/>
               </a:rPr>
-              <a:t>Age-based RR: infant 25–30, child 15–20, adolescent 12–16.</a:t>
+              <a:t>Age-based RR: infant 25–30, child 15–20, adolescent 12–16. PEEP starts 5; can go higher in severe parenchymal disease.</a:t>
             </a:r>
             <a:endParaRPr lang="en-US" sz="1550" dirty="0"/>
           </a:p>
@@ -5419,7 +5419,7 @@
                 <a:spcPct val="100000"/>
               </a:lnSpc>
               <a:spcAft>
-                <a:spcPts val="900"/>
+                <a:spcPts val="1000"/>
               </a:spcAft>
               <a:buSzPct val="100000"/>
               <a:buChar char="•"/>
@@ -5433,7 +5433,7 @@
                 <a:ea typeface="Calibri" pitchFamily="34" charset="-122"/>
                 <a:cs typeface="Calibri" pitchFamily="34" charset="-120"/>
               </a:rPr>
-              <a:t>PALS 2020: cuffed endotracheal tubes are preferred in most pediatric patients, including infants.</a:t>
+              <a:t>PALS 2020: cuffed endotracheal tubes are preferred in most pediatric patients, including infants. Pay attention to cuff pressure to avoid tracheal injury.</a:t>
             </a:r>
             <a:endParaRPr lang="en-US" sz="1550" dirty="0"/>
           </a:p>
@@ -5443,7 +5443,7 @@
                 <a:spcPct val="100000"/>
               </a:lnSpc>
               <a:spcAft>
-                <a:spcPts val="900"/>
+                <a:spcPts val="1000"/>
               </a:spcAft>
               <a:buSzPct val="100000"/>
               <a:buChar char="•"/>
@@ -5457,7 +5457,7 @@
                 <a:ea typeface="Calibri" pitchFamily="34" charset="-122"/>
                 <a:cs typeface="Calibri" pitchFamily="34" charset="-120"/>
               </a:rPr>
-              <a:t>Most common pediatric error: adult circuit on a pediatric patient.</a:t>
+              <a:t>Most common pediatric error: adult circuit on a pediatric patient. Adult circuit dead space can exceed pediatric Vt — you're ventilating the circuit, not the lungs. Use the pediatric circuit.</a:t>
             </a:r>
             <a:endParaRPr lang="en-US" sz="1550" dirty="0"/>
           </a:p>
@@ -5981,7 +5981,9 @@
       </p:sp>
       <p:sp>
         <p:nvSpPr>
-          <p:cNvPr id="14" name="Text 12"/>
+          <p:cNvPr id="14" name="Text 12">
+            <a:hlinkClick r:id="rId1" tooltip="Open this module's simulator mission"/>
+          </p:cNvPr>
           <p:cNvSpPr/>
           <p:nvPr/>
         </p:nvSpPr>
@@ -6004,13 +6006,20 @@
               <a:buNone/>
             </a:pPr>
             <a:r>
-              <a:rPr lang="en-US" sz="1700" b="1" dirty="0">
+              <a:rPr lang="en-US" sz="1700" b="1" u="sng" dirty="0">
                 <a:solidFill>
                   <a:srgbClr val="FFFFFF"/>
                 </a:solidFill>
                 <a:latin typeface="Calibri" pitchFamily="34" charset="0"/>
                 <a:ea typeface="Calibri" pitchFamily="34" charset="-122"/>
                 <a:cs typeface="Calibri" pitchFamily="34" charset="-120"/>
+                <a:hlinkClick r:id="rId1" invalidUrl="" action="" tgtFrame="" tooltip="Open this module's simulator mission" history="1" highlightClick="0" endSnd="0">
+                  <a:extLst>
+                    <a:ext uri="{A12FA001-AC4F-418D-AE19-62706E023703}">
+                      <ahyp:hlinkClr xmlns:ahyp="http://schemas.microsoft.com/office/drawing/2018/hyperlinkcolor" val="tx"/>
+                    </a:ext>
+                  </a:extLst>
+                </a:hlinkClick>
               </a:rPr>
               <a:t>LTV 1200 Simulator</a:t>
             </a:r>
@@ -6043,13 +6052,20 @@
               <a:buNone/>
             </a:pPr>
             <a:r>
-              <a:rPr lang="en-US" sz="1250" dirty="0">
-                <a:solidFill>
-                  <a:srgbClr val="A9C2E0"/>
-                </a:solidFill>
-                <a:latin typeface="Calibri" pitchFamily="34" charset="0"/>
-                <a:ea typeface="Calibri" pitchFamily="34" charset="-122"/>
-                <a:cs typeface="Calibri" pitchFamily="34" charset="-120"/>
+              <a:rPr lang="en-US" sz="1250" u="sng" dirty="0">
+                <a:solidFill>
+                  <a:srgbClr val="7FB0E6"/>
+                </a:solidFill>
+                <a:latin typeface="Calibri" pitchFamily="34" charset="0"/>
+                <a:ea typeface="Calibri" pitchFamily="34" charset="-122"/>
+                <a:cs typeface="Calibri" pitchFamily="34" charset="-120"/>
+                <a:hlinkClick r:id="rId2" invalidUrl="" action="" tgtFrame="" tooltip="" history="1" highlightClick="0" endSnd="0">
+                  <a:extLst>
+                    <a:ext uri="{A12FA001-AC4F-418D-AE19-62706E023703}">
+                      <ahyp:hlinkClr xmlns:ahyp="http://schemas.microsoft.com/office/drawing/2018/hyperlinkcolor" val="tx"/>
+                    </a:ext>
+                  </a:extLst>
+                </a:hlinkClick>
               </a:rPr>
               <a:t>vent-ltv1200.html?level=3  —  Take on the simulator's advanced cases — ARDS, COPD, TBI and more, no hand-holding.</a:t>
             </a:r>

--- a/vta/slides/Module_9_Special_Populations.pptx
+++ b/vta/slides/Module_9_Special_Populations.pptx
@@ -3936,151 +3936,30 @@
           </a:p>
         </p:txBody>
       </p:sp>
-      <p:sp>
-        <p:nvSpPr>
-          <p:cNvPr id="6" name="Shape 4"/>
-          <p:cNvSpPr/>
-          <p:nvPr/>
-        </p:nvSpPr>
-        <p:spPr>
-          <a:xfrm>
-            <a:off x="7315200" y="2148840"/>
-            <a:ext cx="4325112" cy="3840480"/>
-          </a:xfrm>
-          <a:prstGeom prst="roundRect">
-            <a:avLst>
-              <a:gd name="adj" fmla="val 2381"/>
-            </a:avLst>
-          </a:prstGeom>
-          <a:solidFill>
-            <a:srgbClr val="FBEFDD"/>
-          </a:solidFill>
-          <a:ln/>
-        </p:spPr>
-      </p:sp>
-      <p:sp>
-        <p:nvSpPr>
-          <p:cNvPr id="7" name="Text 5"/>
-          <p:cNvSpPr/>
-          <p:nvPr/>
-        </p:nvSpPr>
-        <p:spPr>
-          <a:xfrm>
-            <a:off x="7589520" y="2377440"/>
-            <a:ext cx="3776472" cy="320040"/>
+      <p:pic>
+        <p:nvPicPr>
+          <p:cNvPr id="6" name="Image 0" descr="/tmp/claude-0/-home-user-amr-kc-protocols/883711fe-5eaa-500f-ae13-4d63d2ddcc7e/scratchpad/pngs/autopeep.png">    </p:cNvPr>
+          <p:cNvPicPr>
+            <a:picLocks noChangeAspect="1"/>
+          </p:cNvPicPr>
+          <p:nvPr/>
+        </p:nvPicPr>
+        <p:blipFill>
+          <a:blip r:embed="rId1"/>
+          <a:stretch>
+            <a:fillRect/>
+          </a:stretch>
+        </p:blipFill>
+        <p:spPr>
+          <a:xfrm>
+            <a:off x="7040880" y="2671510"/>
+            <a:ext cx="4709160" cy="2246501"/>
           </a:xfrm>
           <a:prstGeom prst="rect">
             <a:avLst/>
           </a:prstGeom>
-          <a:noFill/>
-          <a:ln/>
-        </p:spPr>
-        <p:txBody>
-          <a:bodyPr wrap="square" rtlCol="0" anchor="ctr"/>
-          <a:lstStyle/>
-          <a:p>
-            <a:pPr indent="0" marL="0">
-              <a:buNone/>
-            </a:pPr>
-            <a:r>
-              <a:rPr lang="en-US" sz="1200" b="1" spc="200" kern="0" dirty="0">
-                <a:solidFill>
-                  <a:srgbClr val="9C540B"/>
-                </a:solidFill>
-                <a:latin typeface="Calibri" pitchFamily="34" charset="0"/>
-                <a:ea typeface="Calibri" pitchFamily="34" charset="-122"/>
-                <a:cs typeface="Calibri" pitchFamily="34" charset="-120"/>
-              </a:rPr>
-              <a:t>CLINICAL PEARL</a:t>
-            </a:r>
-            <a:endParaRPr lang="en-US" sz="1200" dirty="0"/>
-          </a:p>
-        </p:txBody>
-      </p:sp>
-      <p:sp>
-        <p:nvSpPr>
-          <p:cNvPr id="8" name="Text 6"/>
-          <p:cNvSpPr/>
-          <p:nvPr/>
-        </p:nvSpPr>
-        <p:spPr>
-          <a:xfrm>
-            <a:off x="7589520" y="2715768"/>
-            <a:ext cx="3776472" cy="640080"/>
-          </a:xfrm>
-          <a:prstGeom prst="rect">
-            <a:avLst/>
-          </a:prstGeom>
-          <a:noFill/>
-          <a:ln/>
-        </p:spPr>
-        <p:txBody>
-          <a:bodyPr wrap="square" rtlCol="0" anchor="t"/>
-          <a:lstStyle/>
-          <a:p>
-            <a:pPr indent="0" marL="0">
-              <a:lnSpc>
-                <a:spcPct val="95000"/>
-              </a:lnSpc>
-              <a:buNone/>
-            </a:pPr>
-            <a:r>
-              <a:rPr lang="en-US" sz="1700" b="1" dirty="0">
-                <a:solidFill>
-                  <a:srgbClr val="173A68"/>
-                </a:solidFill>
-                <a:latin typeface="Cambria" pitchFamily="34" charset="0"/>
-                <a:ea typeface="Cambria" pitchFamily="34" charset="-122"/>
-                <a:cs typeface="Cambria" pitchFamily="34" charset="-120"/>
-              </a:rPr>
-              <a:t>Brief disconnect</a:t>
-            </a:r>
-            <a:endParaRPr lang="en-US" sz="1700" dirty="0"/>
-          </a:p>
-        </p:txBody>
-      </p:sp>
-      <p:sp>
-        <p:nvSpPr>
-          <p:cNvPr id="9" name="Text 7"/>
-          <p:cNvSpPr/>
-          <p:nvPr/>
-        </p:nvSpPr>
-        <p:spPr>
-          <a:xfrm>
-            <a:off x="7589520" y="3474720"/>
-            <a:ext cx="3776472" cy="2286000"/>
-          </a:xfrm>
-          <a:prstGeom prst="rect">
-            <a:avLst/>
-          </a:prstGeom>
-          <a:noFill/>
-          <a:ln/>
-        </p:spPr>
-        <p:txBody>
-          <a:bodyPr wrap="square" rtlCol="0" anchor="t"/>
-          <a:lstStyle/>
-          <a:p>
-            <a:pPr indent="0" marL="0">
-              <a:lnSpc>
-                <a:spcPct val="103000"/>
-              </a:lnSpc>
-              <a:buNone/>
-            </a:pPr>
-            <a:r>
-              <a:rPr lang="en-US" sz="1350" dirty="0">
-                <a:solidFill>
-                  <a:srgbClr val="1B2433"/>
-                </a:solidFill>
-                <a:latin typeface="Calibri" pitchFamily="34" charset="0"/>
-                <a:ea typeface="Calibri" pitchFamily="34" charset="-122"/>
-                <a:cs typeface="Calibri" pitchFamily="34" charset="-120"/>
-              </a:rPr>
-              <a:t>Hypotensive asthmatic on the vent? Disconnect from the circuit for 5–10 sec. Release the trapped gas. BP often recovers in under a minute. Reconnect on slower settings.</a:t>
-            </a:r>
-            <a:endParaRPr lang="en-US" sz="1350" dirty="0"/>
-          </a:p>
-        </p:txBody>
-      </p:sp>
+        </p:spPr>
+      </p:pic>
     </p:spTree>
   </p:cSld>
   <p:clrMapOvr>

--- a/vta/slides/Module_9_Special_Populations.pptx
+++ b/vta/slides/Module_9_Special_Populations.pptx
@@ -4227,151 +4227,30 @@
           </a:p>
         </p:txBody>
       </p:sp>
-      <p:sp>
-        <p:nvSpPr>
-          <p:cNvPr id="6" name="Shape 4"/>
-          <p:cNvSpPr/>
-          <p:nvPr/>
-        </p:nvSpPr>
-        <p:spPr>
-          <a:xfrm>
-            <a:off x="7315200" y="2148840"/>
-            <a:ext cx="4325112" cy="3840480"/>
-          </a:xfrm>
-          <a:prstGeom prst="roundRect">
-            <a:avLst>
-              <a:gd name="adj" fmla="val 2381"/>
-            </a:avLst>
-          </a:prstGeom>
-          <a:solidFill>
-            <a:srgbClr val="E7F0FD"/>
-          </a:solidFill>
-          <a:ln/>
-        </p:spPr>
-      </p:sp>
-      <p:sp>
-        <p:nvSpPr>
-          <p:cNvPr id="7" name="Text 5"/>
-          <p:cNvSpPr/>
-          <p:nvPr/>
-        </p:nvSpPr>
-        <p:spPr>
-          <a:xfrm>
-            <a:off x="7589520" y="2377440"/>
-            <a:ext cx="3776472" cy="320040"/>
+      <p:pic>
+        <p:nvPicPr>
+          <p:cNvPr id="6" name="Image 0" descr="/tmp/claude-0/-home-user-amr-kc-protocols/883711fe-5eaa-500f-ae13-4d63d2ddcc7e/scratchpad/pngs/peep_fio2.png">    </p:cNvPr>
+          <p:cNvPicPr>
+            <a:picLocks noChangeAspect="1"/>
+          </p:cNvPicPr>
+          <p:nvPr/>
+        </p:nvPicPr>
+        <p:blipFill>
+          <a:blip r:embed="rId1"/>
+          <a:stretch>
+            <a:fillRect/>
+          </a:stretch>
+        </p:blipFill>
+        <p:spPr>
+          <a:xfrm>
+            <a:off x="7040880" y="2746393"/>
+            <a:ext cx="4709160" cy="2096734"/>
           </a:xfrm>
           <a:prstGeom prst="rect">
             <a:avLst/>
           </a:prstGeom>
-          <a:noFill/>
-          <a:ln/>
-        </p:spPr>
-        <p:txBody>
-          <a:bodyPr wrap="square" rtlCol="0" anchor="ctr"/>
-          <a:lstStyle/>
-          <a:p>
-            <a:pPr indent="0" marL="0">
-              <a:buNone/>
-            </a:pPr>
-            <a:r>
-              <a:rPr lang="en-US" sz="1200" b="1" spc="200" kern="0" dirty="0">
-                <a:solidFill>
-                  <a:srgbClr val="1B63C4"/>
-                </a:solidFill>
-                <a:latin typeface="Calibri" pitchFamily="34" charset="0"/>
-                <a:ea typeface="Calibri" pitchFamily="34" charset="-122"/>
-                <a:cs typeface="Calibri" pitchFamily="34" charset="-120"/>
-              </a:rPr>
-              <a:t>EVIDENCE</a:t>
-            </a:r>
-            <a:endParaRPr lang="en-US" sz="1200" dirty="0"/>
-          </a:p>
-        </p:txBody>
-      </p:sp>
-      <p:sp>
-        <p:nvSpPr>
-          <p:cNvPr id="8" name="Text 6"/>
-          <p:cNvSpPr/>
-          <p:nvPr/>
-        </p:nvSpPr>
-        <p:spPr>
-          <a:xfrm>
-            <a:off x="7589520" y="2715768"/>
-            <a:ext cx="3776472" cy="640080"/>
-          </a:xfrm>
-          <a:prstGeom prst="rect">
-            <a:avLst/>
-          </a:prstGeom>
-          <a:noFill/>
-          <a:ln/>
-        </p:spPr>
-        <p:txBody>
-          <a:bodyPr wrap="square" rtlCol="0" anchor="t"/>
-          <a:lstStyle/>
-          <a:p>
-            <a:pPr indent="0" marL="0">
-              <a:lnSpc>
-                <a:spcPct val="95000"/>
-              </a:lnSpc>
-              <a:buNone/>
-            </a:pPr>
-            <a:r>
-              <a:rPr lang="en-US" sz="1700" b="1" dirty="0">
-                <a:solidFill>
-                  <a:srgbClr val="173A68"/>
-                </a:solidFill>
-                <a:latin typeface="Cambria" pitchFamily="34" charset="0"/>
-                <a:ea typeface="Cambria" pitchFamily="34" charset="-122"/>
-                <a:cs typeface="Cambria" pitchFamily="34" charset="-120"/>
-              </a:rPr>
-              <a:t>ARDSNet PEEP/FiO₂ Lower-PEEP Table</a:t>
-            </a:r>
-            <a:endParaRPr lang="en-US" sz="1700" dirty="0"/>
-          </a:p>
-        </p:txBody>
-      </p:sp>
-      <p:sp>
-        <p:nvSpPr>
-          <p:cNvPr id="9" name="Text 7"/>
-          <p:cNvSpPr/>
-          <p:nvPr/>
-        </p:nvSpPr>
-        <p:spPr>
-          <a:xfrm>
-            <a:off x="7589520" y="3474720"/>
-            <a:ext cx="3776472" cy="2286000"/>
-          </a:xfrm>
-          <a:prstGeom prst="rect">
-            <a:avLst/>
-          </a:prstGeom>
-          <a:noFill/>
-          <a:ln/>
-        </p:spPr>
-        <p:txBody>
-          <a:bodyPr wrap="square" rtlCol="0" anchor="t"/>
-          <a:lstStyle/>
-          <a:p>
-            <a:pPr indent="0" marL="0">
-              <a:lnSpc>
-                <a:spcPct val="103000"/>
-              </a:lnSpc>
-              <a:buNone/>
-            </a:pPr>
-            <a:r>
-              <a:rPr lang="en-US" sz="1350" dirty="0">
-                <a:solidFill>
-                  <a:srgbClr val="1B2433"/>
-                </a:solidFill>
-                <a:latin typeface="Calibri" pitchFamily="34" charset="0"/>
-                <a:ea typeface="Calibri" pitchFamily="34" charset="-122"/>
-                <a:cs typeface="Calibri" pitchFamily="34" charset="-120"/>
-              </a:rPr>
-              <a:t>FiO₂ 0.3 → PEEP 5. FiO₂ 0.5 → PEEP 8–10. FiO₂ 0.7 → PEEP 10–14. FiO₂ 1.0 → PEEP 18–24. Carry the card.</a:t>
-            </a:r>
-            <a:endParaRPr lang="en-US" sz="1350" dirty="0"/>
-          </a:p>
-        </p:txBody>
-      </p:sp>
+        </p:spPr>
+      </p:pic>
     </p:spTree>
   </p:cSld>
   <p:clrMapOvr>
